--- a/Dossier_Investisseur_EnerTchad.pptx
+++ b/Dossier_Investisseur_EnerTchad.pptx
@@ -4563,7 +4563,7 @@
                 <a:ea typeface="Calibri" pitchFamily="34" charset="-122"/>
                 <a:cs typeface="Calibri" pitchFamily="34" charset="-120"/>
               </a:rPr>
-              <a:t>Siège : Radisson Blu, Sabangali — N'Djamena, Tchad
+              <a:t>Siège : Block D, 2e étage, bureau 23 — Quartier Sabangali, Cité du 1er décembre, N'Djamena, Tchad
 </a:t>
             </a:r>
             <a:pPr indent="0" marL="0">

--- a/Dossier_Investisseur_EnerTchad.pptx
+++ b/Dossier_Investisseur_EnerTchad.pptx
@@ -3255,7 +3255,7 @@
                 <a:ea typeface="Calibri" pitchFamily="34" charset="-122"/>
                 <a:cs typeface="Calibri" pitchFamily="34" charset="-120"/>
               </a:rPr>
-              <a:t>RCCM N'DJ/RC/2026-A-0001 · conseil d'administration · 10 actionnaires fondateurs</a:t>
+              <a:t>RCCM en cours d'immatriculation · conseil d'administration · 10 actionnaires fondateurs</a:t>
             </a:r>
             <a:endParaRPr lang="en-US" sz="1000" dirty="0"/>
           </a:p>
@@ -4581,7 +4581,7 @@
                 <a:ea typeface="Calibri" pitchFamily="34" charset="-122"/>
                 <a:cs typeface="Calibri" pitchFamily="34" charset="-120"/>
               </a:rPr>
-              <a:t>RCCM N'DJ/RC/2026-A-0001</a:t>
+              <a:t>RCCM : immatriculation en cours</a:t>
             </a:r>
             <a:endParaRPr lang="en-US" sz="1300" dirty="0"/>
           </a:p>

--- a/Dossier_Investisseur_EnerTchad.pptx
+++ b/Dossier_Investisseur_EnerTchad.pptx
@@ -5003,7 +5003,7 @@
                 <a:ea typeface="Calibri" pitchFamily="34" charset="-122"/>
                 <a:cs typeface="Calibri" pitchFamily="34" charset="-120"/>
               </a:rPr>
-              <a:t>42 blocs au cadastre — largement sous-explorés</a:t>
+              <a:t>57 blocs au cadastre — largement sous-explorés</a:t>
             </a:r>
             <a:endParaRPr lang="en-US" sz="1050" dirty="0"/>
           </a:p>

--- a/Dossier_Investisseur_EnerTchad.pptx
+++ b/Dossier_Investisseur_EnerTchad.pptx
@@ -4563,7 +4563,7 @@
                 <a:ea typeface="Calibri" pitchFamily="34" charset="-122"/>
                 <a:cs typeface="Calibri" pitchFamily="34" charset="-120"/>
               </a:rPr>
-              <a:t>Siège : Block D, 2e étage, bureau 23 — Quartier Sabangali, Cité du 1er décembre, N'Djamena, Tchad
+              <a:t>Siège : Radisson Blu, bureau 23 — Quartier Sabangali, Cité du 1er Décembre, BP 6060, N'Djamena, Tchad
 </a:t>
             </a:r>
             <a:pPr indent="0" marL="0">

--- a/Dossier_Investisseur_EnerTchad.pptx
+++ b/Dossier_Investisseur_EnerTchad.pptx
@@ -4545,7 +4545,7 @@
                 <a:ea typeface="Calibri" pitchFamily="34" charset="-122"/>
                 <a:cs typeface="Calibri" pitchFamily="34" charset="-120"/>
               </a:rPr>
-              <a:t>contact@enertchad.td · +235 99 29 86 96
+              <a:t>contact@enertchad.td · +235 30 16 26 26
 </a:t>
             </a:r>
             <a:pPr indent="0" marL="0">
